--- a/Experimental_Design_Reviewer_Slides.pptx
+++ b/Experimental_Design_Reviewer_Slides.pptx
@@ -5300,7 +5300,7 @@
         <p:spPr>
           <a:xfrm>
             <a:off x="1463040" y="457200"/>
-            <a:ext cx="5486400" cy="1828800"/>
+            <a:ext cx="5486400" cy="2286000"/>
           </a:xfrm>
           <a:prstGeom prst="roundRect">
             <a:avLst/>
@@ -5332,18 +5332,18 @@
           <a:p>
             <a:pPr algn="l"/>
             <a:r>
-              <a:rPr sz="1400" b="1">
+              <a:rPr sz="1300" b="1">
                 <a:solidFill>
                   <a:srgbClr val="FFFFFF"/>
                 </a:solidFill>
                 <a:latin typeface="Calibri"/>
               </a:rPr>
-              <a:t>WRONG (current repo)</a:t>
+              <a:t>WRONG (in earlier project notes)</a:t>
             </a:r>
             <a:br/>
             <a:br/>
             <a:r>
-              <a:rPr sz="1400" b="1">
+              <a:rPr sz="1300" b="1">
                 <a:solidFill>
                   <a:srgbClr val="FFFFFF"/>
                 </a:solidFill>
@@ -5352,14 +5352,45 @@
               <a:t>Singh et al. 2023, Sci Immunol</a:t>
             </a:r>
             <a:br/>
-            <a:r>
-              <a:rPr sz="1400" b="1">
+            <a:br/>
+            <a:r>
+              <a:rPr sz="1300" b="1">
                 <a:solidFill>
                   <a:srgbClr val="FFFFFF"/>
                 </a:solidFill>
                 <a:latin typeface="Calibri"/>
               </a:rPr>
-              <a:t>(used in 16 markdown files + slide deck)</a:t>
+              <a:t>Was in 16 markdown files. Corrected</a:t>
+            </a:r>
+            <a:br/>
+            <a:r>
+              <a:rPr sz="1300" b="1">
+                <a:solidFill>
+                  <a:srgbClr val="FFFFFF"/>
+                </a:solidFill>
+                <a:latin typeface="Calibri"/>
+              </a:rPr>
+              <a:t>2026-05-01 via .fix_citations.py (84</a:t>
+            </a:r>
+            <a:br/>
+            <a:r>
+              <a:rPr sz="1300" b="1">
+                <a:solidFill>
+                  <a:srgbClr val="FFFFFF"/>
+                </a:solidFill>
+                <a:latin typeface="Calibri"/>
+              </a:rPr>
+              <a:t>replacements). DAC_Presentation_v2.pptx</a:t>
+            </a:r>
+            <a:br/>
+            <a:r>
+              <a:rPr sz="1300" b="1">
+                <a:solidFill>
+                  <a:srgbClr val="FFFFFF"/>
+                </a:solidFill>
+                <a:latin typeface="Calibri"/>
+              </a:rPr>
+              <a:t>still needs manual correction.</a:t>
             </a:r>
           </a:p>
         </p:txBody>
@@ -5653,7 +5684,7 @@
                 </a:solidFill>
                 <a:latin typeface="Calibri"/>
               </a:rPr>
-              <a:t>Action: find/replace "Singh et al. 2023" → "He et al. 2023" across 16 markdown files + slide deck. PMID, journal, DOI all unchanged.</a:t>
+              <a:t>Action: 16 markdown files corrected 2026-05-01. Manual correction of DAC_Presentation_v2.pptx still needed before DAC.</a:t>
             </a:r>
           </a:p>
         </p:txBody>

--- a/Experimental_Design_Reviewer_Slides.pptx
+++ b/Experimental_Design_Reviewer_Slides.pptx
@@ -19,6 +19,8 @@
     <p:sldId id="267" r:id="rId18"/>
     <p:sldId id="268" r:id="rId19"/>
     <p:sldId id="269" r:id="rId20"/>
+    <p:sldId id="270" r:id="rId21"/>
+    <p:sldId id="271" r:id="rId22"/>
   </p:sldIdLst>
   <p:sldSz cx="12191695" cy="6858000" type="screen4x3"/>
   <p:notesSz cx="6858000" cy="9144000"/>
@@ -5737,6 +5739,1550 @@
                 </a:solidFill>
                 <a:latin typeface="Calibri"/>
               </a:rPr>
+              <a:t>Aims &amp; Objectives — currently stated, with issues</a:t>
+            </a:r>
+          </a:p>
+        </p:txBody>
+      </p:sp>
+      <p:sp>
+        <p:nvSpPr>
+          <p:cNvPr id="3" name="TextBox 2"/>
+          <p:cNvSpPr txBox="1"/>
+          <p:nvPr/>
+        </p:nvSpPr>
+        <p:spPr>
+          <a:xfrm>
+            <a:off x="457200" y="914400"/>
+            <a:ext cx="11277295" cy="365760"/>
+          </a:xfrm>
+          <a:prstGeom prst="rect">
+            <a:avLst/>
+          </a:prstGeom>
+          <a:noFill/>
+        </p:spPr>
+        <p:txBody>
+          <a:bodyPr wrap="square">
+            <a:spAutoFit/>
+          </a:bodyPr>
+          <a:lstStyle/>
+          <a:p>
+            <a:pPr algn="l"/>
+            <a:r>
+              <a:rPr sz="1400" i="1">
+                <a:solidFill>
+                  <a:srgbClr val="333333"/>
+                </a:solidFill>
+                <a:latin typeface="Calibri"/>
+              </a:rPr>
+              <a:t>Both questions are partially answered by published literature; objectives don't capture what the experiments measure</a:t>
+            </a:r>
+          </a:p>
+        </p:txBody>
+      </p:sp>
+      <p:sp>
+        <p:nvSpPr>
+          <p:cNvPr id="4" name="Rounded Rectangle 3"/>
+          <p:cNvSpPr/>
+          <p:nvPr/>
+        </p:nvSpPr>
+        <p:spPr>
+          <a:xfrm>
+            <a:off x="1325880" y="365760"/>
+            <a:ext cx="5669280" cy="1828800"/>
+          </a:xfrm>
+          <a:prstGeom prst="roundRect">
+            <a:avLst/>
+          </a:prstGeom>
+          <a:solidFill>
+            <a:srgbClr val="E8EEF7"/>
+          </a:solidFill>
+          <a:ln>
+            <a:noFill/>
+          </a:ln>
+        </p:spPr>
+        <p:style>
+          <a:lnRef idx="1">
+            <a:schemeClr val="accent1"/>
+          </a:lnRef>
+          <a:fillRef idx="3">
+            <a:schemeClr val="accent1"/>
+          </a:fillRef>
+          <a:effectRef idx="2">
+            <a:schemeClr val="accent1"/>
+          </a:effectRef>
+          <a:fontRef idx="minor">
+            <a:schemeClr val="lt1"/>
+          </a:fontRef>
+        </p:style>
+        <p:txBody>
+          <a:bodyPr rtlCol="0" anchor="ctr" wrap="square" lIns="137160" rIns="137160" tIns="91440" bIns="91440"/>
+          <a:lstStyle/>
+          <a:p>
+            <a:pPr algn="l"/>
+            <a:r>
+              <a:rPr sz="1200" b="0">
+                <a:solidFill>
+                  <a:srgbClr val="333333"/>
+                </a:solidFill>
+                <a:latin typeface="Calibri"/>
+              </a:rPr>
+              <a:t>Q1 (current):</a:t>
+            </a:r>
+            <a:br/>
+            <a:r>
+              <a:rPr sz="1200" b="0">
+                <a:solidFill>
+                  <a:srgbClr val="333333"/>
+                </a:solidFill>
+                <a:latin typeface="Calibri"/>
+              </a:rPr>
+              <a:t>Can tuning the affinity affect the amplitude of the CAR-T signal?</a:t>
+            </a:r>
+            <a:br/>
+            <a:br/>
+            <a:r>
+              <a:rPr sz="1200" b="0">
+                <a:solidFill>
+                  <a:srgbClr val="333333"/>
+                </a:solidFill>
+                <a:latin typeface="Calibri"/>
+              </a:rPr>
+              <a:t>Objective 1 (current):</a:t>
+            </a:r>
+            <a:br/>
+            <a:r>
+              <a:rPr sz="1200" b="0">
+                <a:solidFill>
+                  <a:srgbClr val="333333"/>
+                </a:solidFill>
+                <a:latin typeface="Calibri"/>
+              </a:rPr>
+              <a:t>To determine CAR-T cell efficacy in vivo and in vitro using scFv mutant CAR library.</a:t>
+            </a:r>
+          </a:p>
+        </p:txBody>
+      </p:sp>
+      <p:sp>
+        <p:nvSpPr>
+          <p:cNvPr id="5" name="Rounded Rectangle 4"/>
+          <p:cNvSpPr/>
+          <p:nvPr/>
+        </p:nvSpPr>
+        <p:spPr>
+          <a:xfrm>
+            <a:off x="1325880" y="6126480"/>
+            <a:ext cx="5669280" cy="1828800"/>
+          </a:xfrm>
+          <a:prstGeom prst="roundRect">
+            <a:avLst/>
+          </a:prstGeom>
+          <a:solidFill>
+            <a:srgbClr val="E8EEF7"/>
+          </a:solidFill>
+          <a:ln>
+            <a:noFill/>
+          </a:ln>
+        </p:spPr>
+        <p:style>
+          <a:lnRef idx="1">
+            <a:schemeClr val="accent1"/>
+          </a:lnRef>
+          <a:fillRef idx="3">
+            <a:schemeClr val="accent1"/>
+          </a:fillRef>
+          <a:effectRef idx="2">
+            <a:schemeClr val="accent1"/>
+          </a:effectRef>
+          <a:fontRef idx="minor">
+            <a:schemeClr val="lt1"/>
+          </a:fontRef>
+        </p:style>
+        <p:txBody>
+          <a:bodyPr rtlCol="0" anchor="ctr" wrap="square" lIns="137160" rIns="137160" tIns="91440" bIns="91440"/>
+          <a:lstStyle/>
+          <a:p>
+            <a:pPr algn="l"/>
+            <a:r>
+              <a:rPr sz="1200" b="0">
+                <a:solidFill>
+                  <a:srgbClr val="333333"/>
+                </a:solidFill>
+                <a:latin typeface="Calibri"/>
+              </a:rPr>
+              <a:t>Q2 (current):</a:t>
+            </a:r>
+            <a:br/>
+            <a:r>
+              <a:rPr sz="1200" b="0">
+                <a:solidFill>
+                  <a:srgbClr val="333333"/>
+                </a:solidFill>
+                <a:latin typeface="Calibri"/>
+              </a:rPr>
+              <a:t>Is there any affinity window for CAR-T cells having better therapeutic outcomes?</a:t>
+            </a:r>
+            <a:br/>
+            <a:br/>
+            <a:r>
+              <a:rPr sz="1200" b="0">
+                <a:solidFill>
+                  <a:srgbClr val="333333"/>
+                </a:solidFill>
+                <a:latin typeface="Calibri"/>
+              </a:rPr>
+              <a:t>Objective 2 (current):</a:t>
+            </a:r>
+            <a:br/>
+            <a:r>
+              <a:rPr sz="1200" b="0">
+                <a:solidFill>
+                  <a:srgbClr val="333333"/>
+                </a:solidFill>
+                <a:latin typeface="Calibri"/>
+              </a:rPr>
+              <a:t>To do biophysical characterization of scFv mutants which performed better in vivo as well as in vitro.</a:t>
+            </a:r>
+          </a:p>
+        </p:txBody>
+      </p:sp>
+      <p:graphicFrame>
+        <p:nvGraphicFramePr>
+          <p:cNvPr id="6" name="Table 5"/>
+          <p:cNvGraphicFramePr>
+            <a:graphicFrameLocks noGrp="1"/>
+          </p:cNvGraphicFramePr>
+          <p:nvPr/>
+        </p:nvGraphicFramePr>
+        <p:xfrm>
+          <a:off x="365760" y="3291840"/>
+          <a:ext cx="11460175" cy="3383280"/>
+        </p:xfrm>
+        <a:graphic>
+          <a:graphicData uri="http://schemas.openxmlformats.org/drawingml/2006/table">
+            <a:tbl>
+              <a:tblPr firstRow="1" bandRow="1">
+                <a:tableStyleId>{5C22544A-7EE6-4342-B048-85BDC9FD1C3A}</a:tableStyleId>
+              </a:tblPr>
+              <a:tblGrid>
+                <a:gridCol w="3820058"/>
+                <a:gridCol w="3820058"/>
+                <a:gridCol w="3820059"/>
+              </a:tblGrid>
+              <a:tr h="375920">
+                <a:tc>
+                  <a:txBody>
+                    <a:bodyPr/>
+                    <a:lstStyle/>
+                    <a:p>
+                      <a:r>
+                        <a:rPr sz="1000" b="1">
+                          <a:solidFill>
+                            <a:srgbClr val="FFFFFF"/>
+                          </a:solidFill>
+                          <a:latin typeface="Calibri"/>
+                        </a:rPr>
+                        <a:t>#</a:t>
+                      </a:r>
+                    </a:p>
+                  </a:txBody>
+                  <a:tcPr marL="45720" marR="45720" marT="27432" marB="27432">
+                    <a:solidFill>
+                      <a:srgbClr val="1A237E"/>
+                    </a:solidFill>
+                  </a:tcPr>
+                </a:tc>
+                <a:tc>
+                  <a:txBody>
+                    <a:bodyPr/>
+                    <a:lstStyle/>
+                    <a:p>
+                      <a:r>
+                        <a:rPr sz="1000" b="1">
+                          <a:solidFill>
+                            <a:srgbClr val="FFFFFF"/>
+                          </a:solidFill>
+                          <a:latin typeface="Calibri"/>
+                        </a:rPr>
+                        <a:t>Issue</a:t>
+                      </a:r>
+                    </a:p>
+                  </a:txBody>
+                  <a:tcPr marL="45720" marR="45720" marT="27432" marB="27432">
+                    <a:solidFill>
+                      <a:srgbClr val="1A237E"/>
+                    </a:solidFill>
+                  </a:tcPr>
+                </a:tc>
+                <a:tc>
+                  <a:txBody>
+                    <a:bodyPr/>
+                    <a:lstStyle/>
+                    <a:p>
+                      <a:r>
+                        <a:rPr sz="1000" b="1">
+                          <a:solidFill>
+                            <a:srgbClr val="FFFFFF"/>
+                          </a:solidFill>
+                          <a:latin typeface="Calibri"/>
+                        </a:rPr>
+                        <a:t>Why it matters</a:t>
+                      </a:r>
+                    </a:p>
+                  </a:txBody>
+                  <a:tcPr marL="45720" marR="45720" marT="27432" marB="27432">
+                    <a:solidFill>
+                      <a:srgbClr val="1A237E"/>
+                    </a:solidFill>
+                  </a:tcPr>
+                </a:tc>
+              </a:tr>
+              <a:tr h="375920">
+                <a:tc>
+                  <a:txBody>
+                    <a:bodyPr/>
+                    <a:lstStyle/>
+                    <a:p>
+                      <a:r>
+                        <a:rPr sz="1000">
+                          <a:solidFill>
+                            <a:srgbClr val="333333"/>
+                          </a:solidFill>
+                          <a:latin typeface="Calibri"/>
+                        </a:rPr>
+                        <a:t>Q1</a:t>
+                      </a:r>
+                    </a:p>
+                  </a:txBody>
+                  <a:tcPr marL="45720" marR="45720" marT="27432" marB="27432"/>
+                </a:tc>
+                <a:tc>
+                  <a:txBody>
+                    <a:bodyPr/>
+                    <a:lstStyle/>
+                    <a:p>
+                      <a:r>
+                        <a:rPr sz="1000">
+                          <a:solidFill>
+                            <a:srgbClr val="333333"/>
+                          </a:solidFill>
+                          <a:latin typeface="Calibri"/>
+                        </a:rPr>
+                        <a:t>Binary question; "yes" already answered by Liu 2015, Caruso 2015, Drent 2019, Ghorashian 2019, He 2023, Mao 2022</a:t>
+                      </a:r>
+                    </a:p>
+                  </a:txBody>
+                  <a:tcPr marL="45720" marR="45720" marT="27432" marB="27432"/>
+                </a:tc>
+                <a:tc>
+                  <a:txBody>
+                    <a:bodyPr/>
+                    <a:lstStyle/>
+                    <a:p>
+                      <a:r>
+                        <a:rPr sz="1000">
+                          <a:solidFill>
+                            <a:srgbClr val="333333"/>
+                          </a:solidFill>
+                          <a:latin typeface="Calibri"/>
+                        </a:rPr>
+                        <a:t>DAC will ask: what's the open question?</a:t>
+                      </a:r>
+                    </a:p>
+                  </a:txBody>
+                  <a:tcPr marL="45720" marR="45720" marT="27432" marB="27432"/>
+                </a:tc>
+              </a:tr>
+              <a:tr h="375920">
+                <a:tc>
+                  <a:txBody>
+                    <a:bodyPr/>
+                    <a:lstStyle/>
+                    <a:p>
+                      <a:r>
+                        <a:rPr sz="1000">
+                          <a:solidFill>
+                            <a:srgbClr val="333333"/>
+                          </a:solidFill>
+                          <a:latin typeface="Calibri"/>
+                        </a:rPr>
+                        <a:t>Q1</a:t>
+                      </a:r>
+                    </a:p>
+                  </a:txBody>
+                  <a:tcPr marL="45720" marR="45720" marT="27432" marB="27432">
+                    <a:solidFill>
+                      <a:srgbClr val="E8EEF7"/>
+                    </a:solidFill>
+                  </a:tcPr>
+                </a:tc>
+                <a:tc>
+                  <a:txBody>
+                    <a:bodyPr/>
+                    <a:lstStyle/>
+                    <a:p>
+                      <a:r>
+                        <a:rPr sz="1000">
+                          <a:solidFill>
+                            <a:srgbClr val="333333"/>
+                          </a:solidFill>
+                          <a:latin typeface="Calibri"/>
+                        </a:rPr>
+                        <a:t>"Amplitude of CAR-T signal" ambiguous (proximal? effector? exhaustion?)</a:t>
+                      </a:r>
+                    </a:p>
+                  </a:txBody>
+                  <a:tcPr marL="45720" marR="45720" marT="27432" marB="27432">
+                    <a:solidFill>
+                      <a:srgbClr val="E8EEF7"/>
+                    </a:solidFill>
+                  </a:tcPr>
+                </a:tc>
+                <a:tc>
+                  <a:txBody>
+                    <a:bodyPr/>
+                    <a:lstStyle/>
+                    <a:p>
+                      <a:r>
+                        <a:rPr sz="1000">
+                          <a:solidFill>
+                            <a:srgbClr val="333333"/>
+                          </a:solidFill>
+                          <a:latin typeface="Calibri"/>
+                        </a:rPr>
+                        <a:t>Objective should specify</a:t>
+                      </a:r>
+                    </a:p>
+                  </a:txBody>
+                  <a:tcPr marL="45720" marR="45720" marT="27432" marB="27432">
+                    <a:solidFill>
+                      <a:srgbClr val="E8EEF7"/>
+                    </a:solidFill>
+                  </a:tcPr>
+                </a:tc>
+              </a:tr>
+              <a:tr h="375920">
+                <a:tc>
+                  <a:txBody>
+                    <a:bodyPr/>
+                    <a:lstStyle/>
+                    <a:p>
+                      <a:r>
+                        <a:rPr sz="1000">
+                          <a:solidFill>
+                            <a:srgbClr val="333333"/>
+                          </a:solidFill>
+                          <a:latin typeface="Calibri"/>
+                        </a:rPr>
+                        <a:t>Q1↔O1</a:t>
+                      </a:r>
+                    </a:p>
+                  </a:txBody>
+                  <a:tcPr marL="45720" marR="45720" marT="27432" marB="27432"/>
+                </a:tc>
+                <a:tc>
+                  <a:txBody>
+                    <a:bodyPr/>
+                    <a:lstStyle/>
+                    <a:p>
+                      <a:r>
+                        <a:rPr sz="1000">
+                          <a:solidFill>
+                            <a:srgbClr val="333333"/>
+                          </a:solidFill>
+                          <a:latin typeface="Calibri"/>
+                        </a:rPr>
+                        <a:t>Q asks signal; O measures efficacy. "Efficacy" undefined.</a:t>
+                      </a:r>
+                    </a:p>
+                  </a:txBody>
+                  <a:tcPr marL="45720" marR="45720" marT="27432" marB="27432"/>
+                </a:tc>
+                <a:tc>
+                  <a:txBody>
+                    <a:bodyPr/>
+                    <a:lstStyle/>
+                    <a:p>
+                      <a:r>
+                        <a:rPr sz="1000">
+                          <a:solidFill>
+                            <a:srgbClr val="333333"/>
+                          </a:solidFill>
+                          <a:latin typeface="Calibri"/>
+                        </a:rPr>
+                        <a:t>Mismatch + vagueness</a:t>
+                      </a:r>
+                    </a:p>
+                  </a:txBody>
+                  <a:tcPr marL="45720" marR="45720" marT="27432" marB="27432"/>
+                </a:tc>
+              </a:tr>
+              <a:tr h="375920">
+                <a:tc>
+                  <a:txBody>
+                    <a:bodyPr/>
+                    <a:lstStyle/>
+                    <a:p>
+                      <a:r>
+                        <a:rPr sz="1000">
+                          <a:solidFill>
+                            <a:srgbClr val="333333"/>
+                          </a:solidFill>
+                          <a:latin typeface="Calibri"/>
+                        </a:rPr>
+                        <a:t>O1</a:t>
+                      </a:r>
+                    </a:p>
+                  </a:txBody>
+                  <a:tcPr marL="45720" marR="45720" marT="27432" marB="27432">
+                    <a:solidFill>
+                      <a:srgbClr val="E8EEF7"/>
+                    </a:solidFill>
+                  </a:tcPr>
+                </a:tc>
+                <a:tc>
+                  <a:txBody>
+                    <a:bodyPr/>
+                    <a:lstStyle/>
+                    <a:p>
+                      <a:r>
+                        <a:rPr sz="1000">
+                          <a:solidFill>
+                            <a:srgbClr val="333333"/>
+                          </a:solidFill>
+                          <a:latin typeface="Calibri"/>
+                        </a:rPr>
+                        <a:t>Doesn't reflect what's measured (activation, exhaustion, memory, antigen density, NGS readout)</a:t>
+                      </a:r>
+                    </a:p>
+                  </a:txBody>
+                  <a:tcPr marL="45720" marR="45720" marT="27432" marB="27432">
+                    <a:solidFill>
+                      <a:srgbClr val="E8EEF7"/>
+                    </a:solidFill>
+                  </a:tcPr>
+                </a:tc>
+                <a:tc>
+                  <a:txBody>
+                    <a:bodyPr/>
+                    <a:lstStyle/>
+                    <a:p>
+                      <a:r>
+                        <a:rPr sz="1000">
+                          <a:solidFill>
+                            <a:srgbClr val="333333"/>
+                          </a:solidFill>
+                          <a:latin typeface="Calibri"/>
+                        </a:rPr>
+                        <a:t>Plan ≠ stated objective</a:t>
+                      </a:r>
+                    </a:p>
+                  </a:txBody>
+                  <a:tcPr marL="45720" marR="45720" marT="27432" marB="27432">
+                    <a:solidFill>
+                      <a:srgbClr val="E8EEF7"/>
+                    </a:solidFill>
+                  </a:tcPr>
+                </a:tc>
+              </a:tr>
+              <a:tr h="375920">
+                <a:tc>
+                  <a:txBody>
+                    <a:bodyPr/>
+                    <a:lstStyle/>
+                    <a:p>
+                      <a:r>
+                        <a:rPr sz="1000">
+                          <a:solidFill>
+                            <a:srgbClr val="333333"/>
+                          </a:solidFill>
+                          <a:latin typeface="Calibri"/>
+                        </a:rPr>
+                        <a:t>Q2</a:t>
+                      </a:r>
+                    </a:p>
+                  </a:txBody>
+                  <a:tcPr marL="45720" marR="45720" marT="27432" marB="27432"/>
+                </a:tc>
+                <a:tc>
+                  <a:txBody>
+                    <a:bodyPr/>
+                    <a:lstStyle/>
+                    <a:p>
+                      <a:r>
+                        <a:rPr sz="1000">
+                          <a:solidFill>
+                            <a:srgbClr val="333333"/>
+                          </a:solidFill>
+                          <a:latin typeface="Calibri"/>
+                        </a:rPr>
+                        <a:t>Mao 2022 (PMID 36325345) already identifies clinical optimal 10–60 nM window; Ghorashian 2019 showed low-affinity wins</a:t>
+                      </a:r>
+                    </a:p>
+                  </a:txBody>
+                  <a:tcPr marL="45720" marR="45720" marT="27432" marB="27432"/>
+                </a:tc>
+                <a:tc>
+                  <a:txBody>
+                    <a:bodyPr/>
+                    <a:lstStyle/>
+                    <a:p>
+                      <a:r>
+                        <a:rPr sz="1000">
+                          <a:solidFill>
+                            <a:srgbClr val="333333"/>
+                          </a:solidFill>
+                          <a:latin typeface="Calibri"/>
+                        </a:rPr>
+                        <a:t>Novelty must be reframed</a:t>
+                      </a:r>
+                    </a:p>
+                  </a:txBody>
+                  <a:tcPr marL="45720" marR="45720" marT="27432" marB="27432"/>
+                </a:tc>
+              </a:tr>
+              <a:tr h="375920">
+                <a:tc>
+                  <a:txBody>
+                    <a:bodyPr/>
+                    <a:lstStyle/>
+                    <a:p>
+                      <a:r>
+                        <a:rPr sz="1000">
+                          <a:solidFill>
+                            <a:srgbClr val="333333"/>
+                          </a:solidFill>
+                          <a:latin typeface="Calibri"/>
+                        </a:rPr>
+                        <a:t>Q2</a:t>
+                      </a:r>
+                    </a:p>
+                  </a:txBody>
+                  <a:tcPr marL="45720" marR="45720" marT="27432" marB="27432">
+                    <a:solidFill>
+                      <a:srgbClr val="E8EEF7"/>
+                    </a:solidFill>
+                  </a:tcPr>
+                </a:tc>
+                <a:tc>
+                  <a:txBody>
+                    <a:bodyPr/>
+                    <a:lstStyle/>
+                    <a:p>
+                      <a:r>
+                        <a:rPr sz="1000">
+                          <a:solidFill>
+                            <a:srgbClr val="333333"/>
+                          </a:solidFill>
+                          <a:latin typeface="Calibri"/>
+                        </a:rPr>
+                        <a:t>Misses dwell time / koff axis, 2D kinetics, catch bonds — the genuine novelty</a:t>
+                      </a:r>
+                    </a:p>
+                  </a:txBody>
+                  <a:tcPr marL="45720" marR="45720" marT="27432" marB="27432">
+                    <a:solidFill>
+                      <a:srgbClr val="E8EEF7"/>
+                    </a:solidFill>
+                  </a:tcPr>
+                </a:tc>
+                <a:tc>
+                  <a:txBody>
+                    <a:bodyPr/>
+                    <a:lstStyle/>
+                    <a:p>
+                      <a:r>
+                        <a:rPr sz="1000">
+                          <a:solidFill>
+                            <a:srgbClr val="333333"/>
+                          </a:solidFill>
+                          <a:latin typeface="Calibri"/>
+                        </a:rPr>
+                        <a:t>These are unprecedented for any CAR</a:t>
+                      </a:r>
+                    </a:p>
+                  </a:txBody>
+                  <a:tcPr marL="45720" marR="45720" marT="27432" marB="27432">
+                    <a:solidFill>
+                      <a:srgbClr val="E8EEF7"/>
+                    </a:solidFill>
+                  </a:tcPr>
+                </a:tc>
+              </a:tr>
+              <a:tr h="375920">
+                <a:tc>
+                  <a:txBody>
+                    <a:bodyPr/>
+                    <a:lstStyle/>
+                    <a:p>
+                      <a:r>
+                        <a:rPr sz="1000">
+                          <a:solidFill>
+                            <a:srgbClr val="333333"/>
+                          </a:solidFill>
+                          <a:latin typeface="Calibri"/>
+                        </a:rPr>
+                        <a:t>O2</a:t>
+                      </a:r>
+                    </a:p>
+                  </a:txBody>
+                  <a:tcPr marL="45720" marR="45720" marT="27432" marB="27432"/>
+                </a:tc>
+                <a:tc>
+                  <a:txBody>
+                    <a:bodyPr/>
+                    <a:lstStyle/>
+                    <a:p>
+                      <a:r>
+                        <a:rPr sz="1000">
+                          <a:solidFill>
+                            <a:srgbClr val="333333"/>
+                          </a:solidFill>
+                          <a:latin typeface="Calibri"/>
+                        </a:rPr>
+                        <a:t>"Mutants which performed better" — circular; biophysics IS what defines the window</a:t>
+                      </a:r>
+                    </a:p>
+                  </a:txBody>
+                  <a:tcPr marL="45720" marR="45720" marT="27432" marB="27432"/>
+                </a:tc>
+                <a:tc>
+                  <a:txBody>
+                    <a:bodyPr/>
+                    <a:lstStyle/>
+                    <a:p>
+                      <a:r>
+                        <a:rPr sz="1000">
+                          <a:solidFill>
+                            <a:srgbClr val="333333"/>
+                          </a:solidFill>
+                          <a:latin typeface="Calibri"/>
+                        </a:rPr>
+                        <a:t>Logical sequence problem</a:t>
+                      </a:r>
+                    </a:p>
+                  </a:txBody>
+                  <a:tcPr marL="45720" marR="45720" marT="27432" marB="27432"/>
+                </a:tc>
+              </a:tr>
+              <a:tr h="375920">
+                <a:tc>
+                  <a:txBody>
+                    <a:bodyPr/>
+                    <a:lstStyle/>
+                    <a:p>
+                      <a:r>
+                        <a:rPr sz="1000">
+                          <a:solidFill>
+                            <a:srgbClr val="333333"/>
+                          </a:solidFill>
+                          <a:latin typeface="Calibri"/>
+                        </a:rPr>
+                        <a:t>O2</a:t>
+                      </a:r>
+                    </a:p>
+                  </a:txBody>
+                  <a:tcPr marL="45720" marR="45720" marT="27432" marB="27432">
+                    <a:solidFill>
+                      <a:srgbClr val="E8EEF7"/>
+                    </a:solidFill>
+                  </a:tcPr>
+                </a:tc>
+                <a:tc>
+                  <a:txBody>
+                    <a:bodyPr/>
+                    <a:lstStyle/>
+                    <a:p>
+                      <a:r>
+                        <a:rPr sz="1000">
+                          <a:solidFill>
+                            <a:srgbClr val="333333"/>
+                          </a:solidFill>
+                          <a:latin typeface="Calibri"/>
+                        </a:rPr>
+                        <a:t>Should span full functional spectrum (incl. underperformers) to define a window</a:t>
+                      </a:r>
+                    </a:p>
+                  </a:txBody>
+                  <a:tcPr marL="45720" marR="45720" marT="27432" marB="27432">
+                    <a:solidFill>
+                      <a:srgbClr val="E8EEF7"/>
+                    </a:solidFill>
+                  </a:tcPr>
+                </a:tc>
+                <a:tc>
+                  <a:txBody>
+                    <a:bodyPr/>
+                    <a:lstStyle/>
+                    <a:p>
+                      <a:r>
+                        <a:rPr sz="1000">
+                          <a:solidFill>
+                            <a:srgbClr val="333333"/>
+                          </a:solidFill>
+                          <a:latin typeface="Calibri"/>
+                        </a:rPr>
+                        <a:t>Otherwise it's just a hit list</a:t>
+                      </a:r>
+                    </a:p>
+                  </a:txBody>
+                  <a:tcPr marL="45720" marR="45720" marT="27432" marB="27432">
+                    <a:solidFill>
+                      <a:srgbClr val="E8EEF7"/>
+                    </a:solidFill>
+                  </a:tcPr>
+                </a:tc>
+              </a:tr>
+            </a:tbl>
+          </a:graphicData>
+        </a:graphic>
+      </p:graphicFrame>
+      <p:sp>
+        <p:nvSpPr>
+          <p:cNvPr id="7" name="TextBox 6"/>
+          <p:cNvSpPr txBox="1"/>
+          <p:nvPr/>
+        </p:nvSpPr>
+        <p:spPr>
+          <a:xfrm>
+            <a:off x="457200" y="6537960"/>
+            <a:ext cx="11277295" cy="274320"/>
+          </a:xfrm>
+          <a:prstGeom prst="rect">
+            <a:avLst/>
+          </a:prstGeom>
+          <a:noFill/>
+        </p:spPr>
+        <p:txBody>
+          <a:bodyPr wrap="none">
+            <a:spAutoFit/>
+          </a:bodyPr>
+          <a:lstStyle/>
+          <a:p>
+            <a:pPr algn="l"/>
+            <a:r>
+              <a:rPr sz="900" i="1">
+                <a:solidFill>
+                  <a:srgbClr val="7F7F7F"/>
+                </a:solidFill>
+                <a:latin typeface="Calibri"/>
+              </a:rPr>
+              <a:t>Source: doc 19 §1, §2.</a:t>
+            </a:r>
+          </a:p>
+        </p:txBody>
+      </p:sp>
+    </p:spTree>
+  </p:cSld>
+  <p:clrMapOvr>
+    <a:masterClrMapping/>
+  </p:clrMapOvr>
+</p:sld>
+</file>
+
+<file path=ppt/slides/slide14.xml><?xml version="1.0" encoding="utf-8"?>
+<p:sld xmlns:a="http://schemas.openxmlformats.org/drawingml/2006/main" xmlns:p="http://schemas.openxmlformats.org/presentationml/2006/main" xmlns:r="http://schemas.openxmlformats.org/officeDocument/2006/relationships">
+  <p:cSld>
+    <p:spTree>
+      <p:nvGrpSpPr>
+        <p:cNvPr id="1" name=""/>
+        <p:cNvGrpSpPr/>
+        <p:nvPr/>
+      </p:nvGrpSpPr>
+      <p:grpSpPr/>
+      <p:sp>
+        <p:nvSpPr>
+          <p:cNvPr id="2" name="TextBox 1"/>
+          <p:cNvSpPr txBox="1"/>
+          <p:nvPr/>
+        </p:nvSpPr>
+        <p:spPr>
+          <a:xfrm>
+            <a:off x="457200" y="274320"/>
+            <a:ext cx="11277295" cy="640080"/>
+          </a:xfrm>
+          <a:prstGeom prst="rect">
+            <a:avLst/>
+          </a:prstGeom>
+          <a:noFill/>
+        </p:spPr>
+        <p:txBody>
+          <a:bodyPr wrap="square" lIns="0">
+            <a:spAutoFit/>
+          </a:bodyPr>
+          <a:lstStyle/>
+          <a:p>
+            <a:pPr algn="l"/>
+            <a:r>
+              <a:rPr sz="2800" b="1">
+                <a:solidFill>
+                  <a:srgbClr val="1A237E"/>
+                </a:solidFill>
+                <a:latin typeface="Calibri"/>
+              </a:rPr>
+              <a:t>Aims &amp; Objectives — reformulated + 4-aim structure</a:t>
+            </a:r>
+          </a:p>
+        </p:txBody>
+      </p:sp>
+      <p:sp>
+        <p:nvSpPr>
+          <p:cNvPr id="3" name="TextBox 2"/>
+          <p:cNvSpPr txBox="1"/>
+          <p:nvPr/>
+        </p:nvSpPr>
+        <p:spPr>
+          <a:xfrm>
+            <a:off x="457200" y="914400"/>
+            <a:ext cx="11277295" cy="365760"/>
+          </a:xfrm>
+          <a:prstGeom prst="rect">
+            <a:avLst/>
+          </a:prstGeom>
+          <a:noFill/>
+        </p:spPr>
+        <p:txBody>
+          <a:bodyPr wrap="square">
+            <a:spAutoFit/>
+          </a:bodyPr>
+          <a:lstStyle/>
+          <a:p>
+            <a:pPr algn="l"/>
+            <a:r>
+              <a:rPr sz="1400" i="1">
+                <a:solidFill>
+                  <a:srgbClr val="333333"/>
+                </a:solidFill>
+                <a:latin typeface="Calibri"/>
+              </a:rPr>
+              <a:t>Reframes Q1/Q2 as quantitative mapping problems; surfaces computational + memory + 2D kinetics novelty</a:t>
+            </a:r>
+          </a:p>
+        </p:txBody>
+      </p:sp>
+      <p:sp>
+        <p:nvSpPr>
+          <p:cNvPr id="4" name="Rounded Rectangle 3"/>
+          <p:cNvSpPr/>
+          <p:nvPr/>
+        </p:nvSpPr>
+        <p:spPr>
+          <a:xfrm>
+            <a:off x="1325880" y="365760"/>
+            <a:ext cx="5669280" cy="2194560"/>
+          </a:xfrm>
+          <a:prstGeom prst="roundRect">
+            <a:avLst/>
+          </a:prstGeom>
+          <a:solidFill>
+            <a:srgbClr val="27AE60"/>
+          </a:solidFill>
+          <a:ln>
+            <a:noFill/>
+          </a:ln>
+        </p:spPr>
+        <p:style>
+          <a:lnRef idx="1">
+            <a:schemeClr val="accent1"/>
+          </a:lnRef>
+          <a:fillRef idx="3">
+            <a:schemeClr val="accent1"/>
+          </a:fillRef>
+          <a:effectRef idx="2">
+            <a:schemeClr val="accent1"/>
+          </a:effectRef>
+          <a:fontRef idx="minor">
+            <a:schemeClr val="lt1"/>
+          </a:fontRef>
+        </p:style>
+        <p:txBody>
+          <a:bodyPr rtlCol="0" anchor="ctr" wrap="square" lIns="137160" rIns="137160" tIns="91440" bIns="91440"/>
+          <a:lstStyle/>
+          <a:p>
+            <a:pPr algn="l"/>
+            <a:r>
+              <a:rPr sz="1100" b="1">
+                <a:solidFill>
+                  <a:srgbClr val="FFFFFF"/>
+                </a:solidFill>
+                <a:latin typeface="Calibri"/>
+              </a:rPr>
+              <a:t>Q1 (reformulated):</a:t>
+            </a:r>
+            <a:br/>
+            <a:r>
+              <a:rPr sz="1100" b="1">
+                <a:solidFill>
+                  <a:srgbClr val="FFFFFF"/>
+                </a:solidFill>
+                <a:latin typeface="Calibri"/>
+              </a:rPr>
+              <a:t>How does FMC63 scFv binding affinity quantitatively shape CAR-T activation, effector function, exhaustion, and memory formation, and does this depend on antigen density?</a:t>
+            </a:r>
+            <a:br/>
+            <a:br/>
+            <a:r>
+              <a:rPr sz="1100" b="1">
+                <a:solidFill>
+                  <a:srgbClr val="FFFFFF"/>
+                </a:solidFill>
+                <a:latin typeface="Calibri"/>
+              </a:rPr>
+              <a:t>Objective 1: Map activation kinetics, exhaustion trajectory, cytotoxic function, and memory across the variant library in NALM-6 (graded CD19) + NSG xenograft, sort-then-NGS readout.</a:t>
+            </a:r>
+          </a:p>
+        </p:txBody>
+      </p:sp>
+      <p:sp>
+        <p:nvSpPr>
+          <p:cNvPr id="5" name="Rounded Rectangle 4"/>
+          <p:cNvSpPr/>
+          <p:nvPr/>
+        </p:nvSpPr>
+        <p:spPr>
+          <a:xfrm>
+            <a:off x="1325880" y="6126480"/>
+            <a:ext cx="5669280" cy="2194560"/>
+          </a:xfrm>
+          <a:prstGeom prst="roundRect">
+            <a:avLst/>
+          </a:prstGeom>
+          <a:solidFill>
+            <a:srgbClr val="27AE60"/>
+          </a:solidFill>
+          <a:ln>
+            <a:noFill/>
+          </a:ln>
+        </p:spPr>
+        <p:style>
+          <a:lnRef idx="1">
+            <a:schemeClr val="accent1"/>
+          </a:lnRef>
+          <a:fillRef idx="3">
+            <a:schemeClr val="accent1"/>
+          </a:fillRef>
+          <a:effectRef idx="2">
+            <a:schemeClr val="accent1"/>
+          </a:effectRef>
+          <a:fontRef idx="minor">
+            <a:schemeClr val="lt1"/>
+          </a:fontRef>
+        </p:style>
+        <p:txBody>
+          <a:bodyPr rtlCol="0" anchor="ctr" wrap="square" lIns="137160" rIns="137160" tIns="91440" bIns="91440"/>
+          <a:lstStyle/>
+          <a:p>
+            <a:pPr algn="l"/>
+            <a:r>
+              <a:rPr sz="1100" b="1">
+                <a:solidFill>
+                  <a:srgbClr val="FFFFFF"/>
+                </a:solidFill>
+                <a:latin typeface="Calibri"/>
+              </a:rPr>
+              <a:t>Q2 (reformulated):</a:t>
+            </a:r>
+            <a:br/>
+            <a:r>
+              <a:rPr sz="1100" b="1">
+                <a:solidFill>
+                  <a:srgbClr val="FFFFFF"/>
+                </a:solidFill>
+                <a:latin typeface="Calibri"/>
+              </a:rPr>
+              <a:t>Which kinetic parameter (KD, kon, koff, dwell time, 2D koff, catch-bond lifetime) best predicts CAR-T function, and what is the optimal kinetic window?</a:t>
+            </a:r>
+            <a:br/>
+            <a:br/>
+            <a:r>
+              <a:rPr sz="1100" b="1">
+                <a:solidFill>
+                  <a:srgbClr val="FFFFFF"/>
+                </a:solidFill>
+                <a:latin typeface="Calibri"/>
+              </a:rPr>
+              <a:t>Objective 2: Characterize a panel spanning the full functional spectrum by SPR (3D) + 2D micropipette adhesion frequency (novel for any CAR). Statistically correlate kinetic parameters with functional readouts.</a:t>
+            </a:r>
+          </a:p>
+        </p:txBody>
+      </p:sp>
+      <p:graphicFrame>
+        <p:nvGraphicFramePr>
+          <p:cNvPr id="6" name="Table 5"/>
+          <p:cNvGraphicFramePr>
+            <a:graphicFrameLocks noGrp="1"/>
+          </p:cNvGraphicFramePr>
+          <p:nvPr/>
+        </p:nvGraphicFramePr>
+        <p:xfrm>
+          <a:off x="365760" y="3749039"/>
+          <a:ext cx="11460175" cy="2103120"/>
+        </p:xfrm>
+        <a:graphic>
+          <a:graphicData uri="http://schemas.openxmlformats.org/drawingml/2006/table">
+            <a:tbl>
+              <a:tblPr firstRow="1" bandRow="1">
+                <a:tableStyleId>{5C22544A-7EE6-4342-B048-85BDC9FD1C3A}</a:tableStyleId>
+              </a:tblPr>
+              <a:tblGrid>
+                <a:gridCol w="3820058"/>
+                <a:gridCol w="3820058"/>
+                <a:gridCol w="3820059"/>
+              </a:tblGrid>
+              <a:tr h="420624">
+                <a:tc>
+                  <a:txBody>
+                    <a:bodyPr/>
+                    <a:lstStyle/>
+                    <a:p>
+                      <a:r>
+                        <a:rPr sz="1100" b="1">
+                          <a:solidFill>
+                            <a:srgbClr val="FFFFFF"/>
+                          </a:solidFill>
+                          <a:latin typeface="Calibri"/>
+                        </a:rPr>
+                        <a:t>Aim</a:t>
+                      </a:r>
+                    </a:p>
+                  </a:txBody>
+                  <a:tcPr marL="45720" marR="45720" marT="27432" marB="27432">
+                    <a:solidFill>
+                      <a:srgbClr val="1A237E"/>
+                    </a:solidFill>
+                  </a:tcPr>
+                </a:tc>
+                <a:tc>
+                  <a:txBody>
+                    <a:bodyPr/>
+                    <a:lstStyle/>
+                    <a:p>
+                      <a:r>
+                        <a:rPr sz="1100" b="1">
+                          <a:solidFill>
+                            <a:srgbClr val="FFFFFF"/>
+                          </a:solidFill>
+                          <a:latin typeface="Calibri"/>
+                        </a:rPr>
+                        <a:t>Title</a:t>
+                      </a:r>
+                    </a:p>
+                  </a:txBody>
+                  <a:tcPr marL="45720" marR="45720" marT="27432" marB="27432">
+                    <a:solidFill>
+                      <a:srgbClr val="1A237E"/>
+                    </a:solidFill>
+                  </a:tcPr>
+                </a:tc>
+                <a:tc>
+                  <a:txBody>
+                    <a:bodyPr/>
+                    <a:lstStyle/>
+                    <a:p>
+                      <a:r>
+                        <a:rPr sz="1100" b="1">
+                          <a:solidFill>
+                            <a:srgbClr val="FFFFFF"/>
+                          </a:solidFill>
+                          <a:latin typeface="Calibri"/>
+                        </a:rPr>
+                        <a:t>Maps to</a:t>
+                      </a:r>
+                    </a:p>
+                  </a:txBody>
+                  <a:tcPr marL="45720" marR="45720" marT="27432" marB="27432">
+                    <a:solidFill>
+                      <a:srgbClr val="1A237E"/>
+                    </a:solidFill>
+                  </a:tcPr>
+                </a:tc>
+              </a:tr>
+              <a:tr h="420624">
+                <a:tc>
+                  <a:txBody>
+                    <a:bodyPr/>
+                    <a:lstStyle/>
+                    <a:p>
+                      <a:r>
+                        <a:rPr sz="1100">
+                          <a:solidFill>
+                            <a:srgbClr val="333333"/>
+                          </a:solidFill>
+                          <a:latin typeface="Calibri"/>
+                        </a:rPr>
+                        <a:t>1</a:t>
+                      </a:r>
+                    </a:p>
+                  </a:txBody>
+                  <a:tcPr marL="45720" marR="45720" marT="27432" marB="27432"/>
+                </a:tc>
+                <a:tc>
+                  <a:txBody>
+                    <a:bodyPr/>
+                    <a:lstStyle/>
+                    <a:p>
+                      <a:r>
+                        <a:rPr sz="1100">
+                          <a:solidFill>
+                            <a:srgbClr val="333333"/>
+                          </a:solidFill>
+                          <a:latin typeface="Calibri"/>
+                        </a:rPr>
+                        <a:t>Library design + computational validation (PDB 7URV, mCSM-AB2; NNK at S214, Trp212, Y260, Y261)</a:t>
+                      </a:r>
+                    </a:p>
+                  </a:txBody>
+                  <a:tcPr marL="45720" marR="45720" marT="27432" marB="27432"/>
+                </a:tc>
+                <a:tc>
+                  <a:txBody>
+                    <a:bodyPr/>
+                    <a:lstStyle/>
+                    <a:p>
+                      <a:r>
+                        <a:rPr sz="1100">
+                          <a:solidFill>
+                            <a:srgbClr val="333333"/>
+                          </a:solidFill>
+                          <a:latin typeface="Calibri"/>
+                        </a:rPr>
+                        <a:t>Already done</a:t>
+                      </a:r>
+                    </a:p>
+                  </a:txBody>
+                  <a:tcPr marL="45720" marR="45720" marT="27432" marB="27432"/>
+                </a:tc>
+              </a:tr>
+              <a:tr h="420624">
+                <a:tc>
+                  <a:txBody>
+                    <a:bodyPr/>
+                    <a:lstStyle/>
+                    <a:p>
+                      <a:r>
+                        <a:rPr sz="1100">
+                          <a:solidFill>
+                            <a:srgbClr val="333333"/>
+                          </a:solidFill>
+                          <a:latin typeface="Calibri"/>
+                        </a:rPr>
+                        <a:t>2</a:t>
+                      </a:r>
+                    </a:p>
+                  </a:txBody>
+                  <a:tcPr marL="45720" marR="45720" marT="27432" marB="27432">
+                    <a:solidFill>
+                      <a:srgbClr val="E8EEF7"/>
+                    </a:solidFill>
+                  </a:tcPr>
+                </a:tc>
+                <a:tc>
+                  <a:txBody>
+                    <a:bodyPr/>
+                    <a:lstStyle/>
+                    <a:p>
+                      <a:r>
+                        <a:rPr sz="1100">
+                          <a:solidFill>
+                            <a:srgbClr val="333333"/>
+                          </a:solidFill>
+                          <a:latin typeface="Calibri"/>
+                        </a:rPr>
+                        <a:t>Functional mapping in vitro + in vivo (activation/exhaustion/memory across library; sort-then-NGS)</a:t>
+                      </a:r>
+                    </a:p>
+                  </a:txBody>
+                  <a:tcPr marL="45720" marR="45720" marT="27432" marB="27432">
+                    <a:solidFill>
+                      <a:srgbClr val="E8EEF7"/>
+                    </a:solidFill>
+                  </a:tcPr>
+                </a:tc>
+                <a:tc>
+                  <a:txBody>
+                    <a:bodyPr/>
+                    <a:lstStyle/>
+                    <a:p>
+                      <a:r>
+                        <a:rPr sz="1100">
+                          <a:solidFill>
+                            <a:srgbClr val="333333"/>
+                          </a:solidFill>
+                          <a:latin typeface="Calibri"/>
+                        </a:rPr>
+                        <a:t>Q1 / Obj 1</a:t>
+                      </a:r>
+                    </a:p>
+                  </a:txBody>
+                  <a:tcPr marL="45720" marR="45720" marT="27432" marB="27432">
+                    <a:solidFill>
+                      <a:srgbClr val="E8EEF7"/>
+                    </a:solidFill>
+                  </a:tcPr>
+                </a:tc>
+              </a:tr>
+              <a:tr h="420624">
+                <a:tc>
+                  <a:txBody>
+                    <a:bodyPr/>
+                    <a:lstStyle/>
+                    <a:p>
+                      <a:r>
+                        <a:rPr sz="1100">
+                          <a:solidFill>
+                            <a:srgbClr val="333333"/>
+                          </a:solidFill>
+                          <a:latin typeface="Calibri"/>
+                        </a:rPr>
+                        <a:t>3</a:t>
+                      </a:r>
+                    </a:p>
+                  </a:txBody>
+                  <a:tcPr marL="45720" marR="45720" marT="27432" marB="27432"/>
+                </a:tc>
+                <a:tc>
+                  <a:txBody>
+                    <a:bodyPr/>
+                    <a:lstStyle/>
+                    <a:p>
+                      <a:r>
+                        <a:rPr sz="1100">
+                          <a:solidFill>
+                            <a:srgbClr val="333333"/>
+                          </a:solidFill>
+                          <a:latin typeface="Calibri"/>
+                        </a:rPr>
+                        <a:t>Biophysical characterization + kinetic-functional correlation (SPR + 2D adhesion frequency)</a:t>
+                      </a:r>
+                    </a:p>
+                  </a:txBody>
+                  <a:tcPr marL="45720" marR="45720" marT="27432" marB="27432"/>
+                </a:tc>
+                <a:tc>
+                  <a:txBody>
+                    <a:bodyPr/>
+                    <a:lstStyle/>
+                    <a:p>
+                      <a:r>
+                        <a:rPr sz="1100">
+                          <a:solidFill>
+                            <a:srgbClr val="333333"/>
+                          </a:solidFill>
+                          <a:latin typeface="Calibri"/>
+                        </a:rPr>
+                        <a:t>Q2 / Obj 2</a:t>
+                      </a:r>
+                    </a:p>
+                  </a:txBody>
+                  <a:tcPr marL="45720" marR="45720" marT="27432" marB="27432"/>
+                </a:tc>
+              </a:tr>
+              <a:tr h="420624">
+                <a:tc>
+                  <a:txBody>
+                    <a:bodyPr/>
+                    <a:lstStyle/>
+                    <a:p>
+                      <a:r>
+                        <a:rPr sz="1100">
+                          <a:solidFill>
+                            <a:srgbClr val="333333"/>
+                          </a:solidFill>
+                          <a:latin typeface="Calibri"/>
+                        </a:rPr>
+                        <a:t>4 (optional)</a:t>
+                      </a:r>
+                    </a:p>
+                  </a:txBody>
+                  <a:tcPr marL="45720" marR="45720" marT="27432" marB="27432">
+                    <a:solidFill>
+                      <a:srgbClr val="E8EEF7"/>
+                    </a:solidFill>
+                  </a:tcPr>
+                </a:tc>
+                <a:tc>
+                  <a:txBody>
+                    <a:bodyPr/>
+                    <a:lstStyle/>
+                    <a:p>
+                      <a:r>
+                        <a:rPr sz="1100">
+                          <a:solidFill>
+                            <a:srgbClr val="333333"/>
+                          </a:solidFill>
+                          <a:latin typeface="Calibri"/>
+                        </a:rPr>
+                        <a:t>Translational validation (primary T cells; NSG-MHC-DKO persistence + memory recall)</a:t>
+                      </a:r>
+                    </a:p>
+                  </a:txBody>
+                  <a:tcPr marL="45720" marR="45720" marT="27432" marB="27432">
+                    <a:solidFill>
+                      <a:srgbClr val="E8EEF7"/>
+                    </a:solidFill>
+                  </a:tcPr>
+                </a:tc>
+                <a:tc>
+                  <a:txBody>
+                    <a:bodyPr/>
+                    <a:lstStyle/>
+                    <a:p>
+                      <a:r>
+                        <a:rPr sz="1100">
+                          <a:solidFill>
+                            <a:srgbClr val="333333"/>
+                          </a:solidFill>
+                          <a:latin typeface="Calibri"/>
+                        </a:rPr>
+                        <a:t>Stretch goal</a:t>
+                      </a:r>
+                    </a:p>
+                  </a:txBody>
+                  <a:tcPr marL="45720" marR="45720" marT="27432" marB="27432">
+                    <a:solidFill>
+                      <a:srgbClr val="E8EEF7"/>
+                    </a:solidFill>
+                  </a:tcPr>
+                </a:tc>
+              </a:tr>
+            </a:tbl>
+          </a:graphicData>
+        </a:graphic>
+      </p:graphicFrame>
+      <p:sp>
+        <p:nvSpPr>
+          <p:cNvPr id="7" name="Rounded Rectangle 6"/>
+          <p:cNvSpPr/>
+          <p:nvPr/>
+        </p:nvSpPr>
+        <p:spPr>
+          <a:xfrm>
+            <a:off x="365760" y="5943600"/>
+            <a:ext cx="11460175" cy="777240"/>
+          </a:xfrm>
+          <a:prstGeom prst="roundRect">
+            <a:avLst/>
+          </a:prstGeom>
+          <a:solidFill>
+            <a:srgbClr val="1A237E"/>
+          </a:solidFill>
+          <a:ln>
+            <a:noFill/>
+          </a:ln>
+        </p:spPr>
+        <p:style>
+          <a:lnRef idx="1">
+            <a:schemeClr val="accent1"/>
+          </a:lnRef>
+          <a:fillRef idx="3">
+            <a:schemeClr val="accent1"/>
+          </a:fillRef>
+          <a:effectRef idx="2">
+            <a:schemeClr val="accent1"/>
+          </a:effectRef>
+          <a:fontRef idx="minor">
+            <a:schemeClr val="lt1"/>
+          </a:fontRef>
+        </p:style>
+        <p:txBody>
+          <a:bodyPr rtlCol="0" anchor="ctr" wrap="square" lIns="137160" rIns="137160" tIns="91440" bIns="91440"/>
+          <a:lstStyle/>
+          <a:p>
+            <a:pPr algn="l"/>
+            <a:r>
+              <a:rPr sz="1200" b="1">
+                <a:solidFill>
+                  <a:srgbClr val="FFFFFF"/>
+                </a:solidFill>
+                <a:latin typeface="Calibri"/>
+              </a:rPr>
+              <a:t>Pitch: "First systematic dataset linking ~376 FMC63 variants to full functional matrix (activation/exhaustion/memory/persistence) and multi-parameter kinetic dataset (3D + 2D + force-dependent), defining the kinetic-function relationship for anti-CD19 CAR-T therapy."</a:t>
+            </a:r>
+          </a:p>
+        </p:txBody>
+      </p:sp>
+      <p:sp>
+        <p:nvSpPr>
+          <p:cNvPr id="8" name="TextBox 7"/>
+          <p:cNvSpPr txBox="1"/>
+          <p:nvPr/>
+        </p:nvSpPr>
+        <p:spPr>
+          <a:xfrm>
+            <a:off x="457200" y="6537960"/>
+            <a:ext cx="11277295" cy="274320"/>
+          </a:xfrm>
+          <a:prstGeom prst="rect">
+            <a:avLst/>
+          </a:prstGeom>
+          <a:noFill/>
+        </p:spPr>
+        <p:txBody>
+          <a:bodyPr wrap="none">
+            <a:spAutoFit/>
+          </a:bodyPr>
+          <a:lstStyle/>
+          <a:p>
+            <a:pPr algn="l"/>
+            <a:r>
+              <a:rPr sz="900" i="1">
+                <a:solidFill>
+                  <a:srgbClr val="7F7F7F"/>
+                </a:solidFill>
+                <a:latin typeface="Calibri"/>
+              </a:rPr>
+              <a:t>Source: doc 19 §3, §4, §6.</a:t>
+            </a:r>
+          </a:p>
+        </p:txBody>
+      </p:sp>
+    </p:spTree>
+  </p:cSld>
+  <p:clrMapOvr>
+    <a:masterClrMapping/>
+  </p:clrMapOvr>
+</p:sld>
+</file>
+
+<file path=ppt/slides/slide15.xml><?xml version="1.0" encoding="utf-8"?>
+<p:sld xmlns:a="http://schemas.openxmlformats.org/drawingml/2006/main" xmlns:p="http://schemas.openxmlformats.org/presentationml/2006/main" xmlns:r="http://schemas.openxmlformats.org/officeDocument/2006/relationships">
+  <p:cSld>
+    <p:spTree>
+      <p:nvGrpSpPr>
+        <p:cNvPr id="1" name=""/>
+        <p:cNvGrpSpPr/>
+        <p:nvPr/>
+      </p:nvGrpSpPr>
+      <p:grpSpPr/>
+      <p:sp>
+        <p:nvSpPr>
+          <p:cNvPr id="2" name="TextBox 1"/>
+          <p:cNvSpPr txBox="1"/>
+          <p:nvPr/>
+        </p:nvSpPr>
+        <p:spPr>
+          <a:xfrm>
+            <a:off x="457200" y="274320"/>
+            <a:ext cx="11277295" cy="640080"/>
+          </a:xfrm>
+          <a:prstGeom prst="rect">
+            <a:avLst/>
+          </a:prstGeom>
+          <a:noFill/>
+        </p:spPr>
+        <p:txBody>
+          <a:bodyPr wrap="square" lIns="0">
+            <a:spAutoFit/>
+          </a:bodyPr>
+          <a:lstStyle/>
+          <a:p>
+            <a:pPr algn="l"/>
+            <a:r>
+              <a:rPr sz="2800" b="1">
+                <a:solidFill>
+                  <a:srgbClr val="1A237E"/>
+                </a:solidFill>
+                <a:latin typeface="Calibri"/>
+              </a:rPr>
               <a:t>Summary — prioritized recommendations</a:t>
             </a:r>
           </a:p>
@@ -6680,7 +8226,7 @@
 </p:sld>
 </file>
 
-<file path=ppt/slides/slide14.xml><?xml version="1.0" encoding="utf-8"?>
+<file path=ppt/slides/slide16.xml><?xml version="1.0" encoding="utf-8"?>
 <p:sld xmlns:a="http://schemas.openxmlformats.org/drawingml/2006/main" xmlns:p="http://schemas.openxmlformats.org/presentationml/2006/main" xmlns:r="http://schemas.openxmlformats.org/officeDocument/2006/relationships">
   <p:cSld>
     <p:spTree>
